--- a/Bee.CTOS.系统架构图.pptx
+++ b/Bee.CTOS.系统架构图.pptx
@@ -245,7 +245,7 @@
             <a:fld id="{9AD89A4D-DCA1-4F8E-95E9-E487FD906CDF}" type="datetimeFigureOut">
               <a:rPr lang="zh-CN" altLang="en-US" smtClean="0"/>
               <a:pPr/>
-              <a:t>2025-01-10</a:t>
+              <a:t>2025-01-15</a:t>
             </a:fld>
             <a:endParaRPr lang="zh-CN" altLang="en-US"/>
           </a:p>
@@ -441,7 +441,7 @@
               <a:pPr>
                 <a:defRPr/>
               </a:pPr>
-              <a:t>2025-01-10</a:t>
+              <a:t>2025-01-15</a:t>
             </a:fld>
             <a:endParaRPr lang="zh-CN" altLang="en-US"/>
           </a:p>
@@ -830,7 +830,7 @@
             <a:fld id="{5CE71918-5BB5-48A1-B847-28BA0F6365FD}" type="datetimeFigureOut">
               <a:rPr lang="zh-CN" altLang="en-US" smtClean="0"/>
               <a:pPr/>
-              <a:t>2025-01-10</a:t>
+              <a:t>2025-01-15</a:t>
             </a:fld>
             <a:endParaRPr lang="zh-CN" altLang="en-US"/>
           </a:p>
@@ -1137,7 +1137,7 @@
             <a:fld id="{5CE71918-5BB5-48A1-B847-28BA0F6365FD}" type="datetimeFigureOut">
               <a:rPr lang="zh-CN" altLang="en-US" smtClean="0"/>
               <a:pPr/>
-              <a:t>2025-01-10</a:t>
+              <a:t>2025-01-15</a:t>
             </a:fld>
             <a:endParaRPr lang="zh-CN" altLang="en-US"/>
           </a:p>
@@ -1387,7 +1387,7 @@
             <a:fld id="{5CE71918-5BB5-48A1-B847-28BA0F6365FD}" type="datetimeFigureOut">
               <a:rPr lang="zh-CN" altLang="en-US" smtClean="0"/>
               <a:pPr/>
-              <a:t>2025-01-10</a:t>
+              <a:t>2025-01-15</a:t>
             </a:fld>
             <a:endParaRPr lang="zh-CN" altLang="en-US"/>
           </a:p>
@@ -1553,7 +1553,7 @@
             <a:fld id="{5CE71918-5BB5-48A1-B847-28BA0F6365FD}" type="datetimeFigureOut">
               <a:rPr lang="zh-CN" altLang="en-US" smtClean="0"/>
               <a:pPr/>
-              <a:t>2025-01-10</a:t>
+              <a:t>2025-01-15</a:t>
             </a:fld>
             <a:endParaRPr lang="zh-CN" altLang="en-US"/>
           </a:p>
@@ -1729,7 +1729,7 @@
             <a:fld id="{5CE71918-5BB5-48A1-B847-28BA0F6365FD}" type="datetimeFigureOut">
               <a:rPr lang="zh-CN" altLang="en-US" smtClean="0"/>
               <a:pPr/>
-              <a:t>2025-01-10</a:t>
+              <a:t>2025-01-15</a:t>
             </a:fld>
             <a:endParaRPr lang="zh-CN" altLang="en-US"/>
           </a:p>
@@ -3455,7 +3455,7 @@
             <a:fld id="{5CE71918-5BB5-48A1-B847-28BA0F6365FD}" type="datetimeFigureOut">
               <a:rPr lang="zh-CN" altLang="en-US" smtClean="0"/>
               <a:pPr/>
-              <a:t>2025-01-10</a:t>
+              <a:t>2025-01-15</a:t>
             </a:fld>
             <a:endParaRPr lang="zh-CN" altLang="en-US"/>
           </a:p>
@@ -3553,7 +3553,7 @@
               <a:pPr>
                 <a:defRPr/>
               </a:pPr>
-              <a:t>2025-01-10</a:t>
+              <a:t>2025-01-15</a:t>
             </a:fld>
             <a:endParaRPr lang="zh-CN" altLang="en-US"/>
           </a:p>
@@ -3844,7 +3844,7 @@
             <a:fld id="{5CE71918-5BB5-48A1-B847-28BA0F6365FD}" type="datetimeFigureOut">
               <a:rPr lang="zh-CN" altLang="en-US" smtClean="0"/>
               <a:pPr/>
-              <a:t>2025-01-10</a:t>
+              <a:t>2025-01-15</a:t>
             </a:fld>
             <a:endParaRPr lang="zh-CN" altLang="en-US"/>
           </a:p>
@@ -4127,7 +4127,7 @@
             <a:fld id="{5CE71918-5BB5-48A1-B847-28BA0F6365FD}" type="datetimeFigureOut">
               <a:rPr lang="zh-CN" altLang="en-US" smtClean="0"/>
               <a:pPr/>
-              <a:t>2025-01-10</a:t>
+              <a:t>2025-01-15</a:t>
             </a:fld>
             <a:endParaRPr lang="zh-CN" altLang="en-US"/>
           </a:p>
@@ -4549,7 +4549,7 @@
             <a:fld id="{5CE71918-5BB5-48A1-B847-28BA0F6365FD}" type="datetimeFigureOut">
               <a:rPr lang="zh-CN" altLang="en-US" smtClean="0"/>
               <a:pPr/>
-              <a:t>2025-01-10</a:t>
+              <a:t>2025-01-15</a:t>
             </a:fld>
             <a:endParaRPr lang="zh-CN" altLang="en-US"/>
           </a:p>
@@ -4664,7 +4664,7 @@
             <a:fld id="{5CE71918-5BB5-48A1-B847-28BA0F6365FD}" type="datetimeFigureOut">
               <a:rPr lang="zh-CN" altLang="en-US" smtClean="0"/>
               <a:pPr/>
-              <a:t>2025-01-10</a:t>
+              <a:t>2025-01-15</a:t>
             </a:fld>
             <a:endParaRPr lang="zh-CN" altLang="en-US"/>
           </a:p>
@@ -5385,7 +5385,7 @@
             <a:fld id="{5CE71918-5BB5-48A1-B847-28BA0F6365FD}" type="datetimeFigureOut">
               <a:rPr lang="zh-CN" altLang="en-US" smtClean="0"/>
               <a:pPr/>
-              <a:t>2025-01-10</a:t>
+              <a:t>2025-01-15</a:t>
             </a:fld>
             <a:endParaRPr lang="zh-CN" altLang="en-US"/>
           </a:p>
@@ -6647,7 +6647,7 @@
                 <a:latin typeface="微软雅黑" panose="020B0503020204020204" pitchFamily="34" charset="-122"/>
                 <a:ea typeface="微软雅黑" panose="020B0503020204020204" pitchFamily="34" charset="-122"/>
               </a:rPr>
-              <a:t>水平运输调度</a:t>
+              <a:t>内集卡调度</a:t>
             </a:r>
             <a:endParaRPr lang="en-US" altLang="zh-CN" sz="600" dirty="0">
               <a:solidFill>
@@ -6667,7 +6667,7 @@
                 <a:latin typeface="微软雅黑" panose="020B0503020204020204" pitchFamily="34" charset="-122"/>
                 <a:ea typeface="微软雅黑" panose="020B0503020204020204" pitchFamily="34" charset="-122"/>
               </a:rPr>
-              <a:t>Collaborative Truck Scheduling System</a:t>
+              <a:t>Internal Truck Scheduling System</a:t>
             </a:r>
             <a:endParaRPr lang="zh-CN" altLang="en-US" sz="600" dirty="0">
               <a:solidFill>

--- a/Bee.CTOS.系统架构图.pptx
+++ b/Bee.CTOS.系统架构图.pptx
@@ -245,7 +245,7 @@
             <a:fld id="{9AD89A4D-DCA1-4F8E-95E9-E487FD906CDF}" type="datetimeFigureOut">
               <a:rPr lang="zh-CN" altLang="en-US" smtClean="0"/>
               <a:pPr/>
-              <a:t>2025-01-15</a:t>
+              <a:t>2025-01-16</a:t>
             </a:fld>
             <a:endParaRPr lang="zh-CN" altLang="en-US"/>
           </a:p>
@@ -441,7 +441,7 @@
               <a:pPr>
                 <a:defRPr/>
               </a:pPr>
-              <a:t>2025-01-15</a:t>
+              <a:t>2025-01-16</a:t>
             </a:fld>
             <a:endParaRPr lang="zh-CN" altLang="en-US"/>
           </a:p>
@@ -830,7 +830,7 @@
             <a:fld id="{5CE71918-5BB5-48A1-B847-28BA0F6365FD}" type="datetimeFigureOut">
               <a:rPr lang="zh-CN" altLang="en-US" smtClean="0"/>
               <a:pPr/>
-              <a:t>2025-01-15</a:t>
+              <a:t>2025-01-16</a:t>
             </a:fld>
             <a:endParaRPr lang="zh-CN" altLang="en-US"/>
           </a:p>
@@ -1137,7 +1137,7 @@
             <a:fld id="{5CE71918-5BB5-48A1-B847-28BA0F6365FD}" type="datetimeFigureOut">
               <a:rPr lang="zh-CN" altLang="en-US" smtClean="0"/>
               <a:pPr/>
-              <a:t>2025-01-15</a:t>
+              <a:t>2025-01-16</a:t>
             </a:fld>
             <a:endParaRPr lang="zh-CN" altLang="en-US"/>
           </a:p>
@@ -1387,7 +1387,7 @@
             <a:fld id="{5CE71918-5BB5-48A1-B847-28BA0F6365FD}" type="datetimeFigureOut">
               <a:rPr lang="zh-CN" altLang="en-US" smtClean="0"/>
               <a:pPr/>
-              <a:t>2025-01-15</a:t>
+              <a:t>2025-01-16</a:t>
             </a:fld>
             <a:endParaRPr lang="zh-CN" altLang="en-US"/>
           </a:p>
@@ -1553,7 +1553,7 @@
             <a:fld id="{5CE71918-5BB5-48A1-B847-28BA0F6365FD}" type="datetimeFigureOut">
               <a:rPr lang="zh-CN" altLang="en-US" smtClean="0"/>
               <a:pPr/>
-              <a:t>2025-01-15</a:t>
+              <a:t>2025-01-16</a:t>
             </a:fld>
             <a:endParaRPr lang="zh-CN" altLang="en-US"/>
           </a:p>
@@ -1729,7 +1729,7 @@
             <a:fld id="{5CE71918-5BB5-48A1-B847-28BA0F6365FD}" type="datetimeFigureOut">
               <a:rPr lang="zh-CN" altLang="en-US" smtClean="0"/>
               <a:pPr/>
-              <a:t>2025-01-15</a:t>
+              <a:t>2025-01-16</a:t>
             </a:fld>
             <a:endParaRPr lang="zh-CN" altLang="en-US"/>
           </a:p>
@@ -3455,7 +3455,7 @@
             <a:fld id="{5CE71918-5BB5-48A1-B847-28BA0F6365FD}" type="datetimeFigureOut">
               <a:rPr lang="zh-CN" altLang="en-US" smtClean="0"/>
               <a:pPr/>
-              <a:t>2025-01-15</a:t>
+              <a:t>2025-01-16</a:t>
             </a:fld>
             <a:endParaRPr lang="zh-CN" altLang="en-US"/>
           </a:p>
@@ -3553,7 +3553,7 @@
               <a:pPr>
                 <a:defRPr/>
               </a:pPr>
-              <a:t>2025-01-15</a:t>
+              <a:t>2025-01-16</a:t>
             </a:fld>
             <a:endParaRPr lang="zh-CN" altLang="en-US"/>
           </a:p>
@@ -3844,7 +3844,7 @@
             <a:fld id="{5CE71918-5BB5-48A1-B847-28BA0F6365FD}" type="datetimeFigureOut">
               <a:rPr lang="zh-CN" altLang="en-US" smtClean="0"/>
               <a:pPr/>
-              <a:t>2025-01-15</a:t>
+              <a:t>2025-01-16</a:t>
             </a:fld>
             <a:endParaRPr lang="zh-CN" altLang="en-US"/>
           </a:p>
@@ -4127,7 +4127,7 @@
             <a:fld id="{5CE71918-5BB5-48A1-B847-28BA0F6365FD}" type="datetimeFigureOut">
               <a:rPr lang="zh-CN" altLang="en-US" smtClean="0"/>
               <a:pPr/>
-              <a:t>2025-01-15</a:t>
+              <a:t>2025-01-16</a:t>
             </a:fld>
             <a:endParaRPr lang="zh-CN" altLang="en-US"/>
           </a:p>
@@ -4549,7 +4549,7 @@
             <a:fld id="{5CE71918-5BB5-48A1-B847-28BA0F6365FD}" type="datetimeFigureOut">
               <a:rPr lang="zh-CN" altLang="en-US" smtClean="0"/>
               <a:pPr/>
-              <a:t>2025-01-15</a:t>
+              <a:t>2025-01-16</a:t>
             </a:fld>
             <a:endParaRPr lang="zh-CN" altLang="en-US"/>
           </a:p>
@@ -4664,7 +4664,7 @@
             <a:fld id="{5CE71918-5BB5-48A1-B847-28BA0F6365FD}" type="datetimeFigureOut">
               <a:rPr lang="zh-CN" altLang="en-US" smtClean="0"/>
               <a:pPr/>
-              <a:t>2025-01-15</a:t>
+              <a:t>2025-01-16</a:t>
             </a:fld>
             <a:endParaRPr lang="zh-CN" altLang="en-US"/>
           </a:p>
@@ -5385,7 +5385,7 @@
             <a:fld id="{5CE71918-5BB5-48A1-B847-28BA0F6365FD}" type="datetimeFigureOut">
               <a:rPr lang="zh-CN" altLang="en-US" smtClean="0"/>
               <a:pPr/>
-              <a:t>2025-01-15</a:t>
+              <a:t>2025-01-16</a:t>
             </a:fld>
             <a:endParaRPr lang="zh-CN" altLang="en-US"/>
           </a:p>
@@ -8641,8 +8641,8 @@
         </p:nvSpPr>
         <p:spPr>
           <a:xfrm>
-            <a:off x="4276728" y="3642661"/>
-            <a:ext cx="522191" cy="668819"/>
+            <a:off x="4250618" y="3642661"/>
+            <a:ext cx="574410" cy="668819"/>
           </a:xfrm>
           <a:prstGeom prst="rect">
             <a:avLst/>
@@ -8676,7 +8676,7 @@
                 <a:latin typeface="微软雅黑" panose="020B0503020204020204" pitchFamily="34" charset="-122"/>
                 <a:ea typeface="微软雅黑" panose="020B0503020204020204" pitchFamily="34" charset="-122"/>
               </a:rPr>
-              <a:t>水平运输调度</a:t>
+              <a:t>内集卡调度</a:t>
             </a:r>
           </a:p>
         </p:txBody>
@@ -9577,9 +9577,9 @@
           <p:nvPr/>
         </p:nvCxnSpPr>
         <p:spPr>
-          <a:xfrm flipH="1">
+          <a:xfrm>
             <a:off x="4537823" y="4311480"/>
-            <a:ext cx="1" cy="476366"/>
+            <a:ext cx="0" cy="476366"/>
           </a:xfrm>
           <a:prstGeom prst="straightConnector1">
             <a:avLst/>
@@ -9621,7 +9621,7 @@
         <p:spPr>
           <a:xfrm>
             <a:off x="4489004" y="4418774"/>
-            <a:ext cx="800219" cy="184666"/>
+            <a:ext cx="723275" cy="184666"/>
           </a:xfrm>
           <a:prstGeom prst="rect">
             <a:avLst/>
@@ -9636,7 +9636,7 @@
           <a:p>
             <a:r>
               <a:rPr lang="zh-CN" altLang="en-US" sz="600" dirty="0"/>
-              <a:t>水平运输作业指令</a:t>
+              <a:t>内集卡作业指令</a:t>
             </a:r>
           </a:p>
         </p:txBody>
@@ -10193,7 +10193,7 @@
         <p:spPr>
           <a:xfrm>
             <a:off x="3695525" y="3977071"/>
-            <a:ext cx="581203" cy="0"/>
+            <a:ext cx="555093" cy="0"/>
           </a:xfrm>
           <a:prstGeom prst="straightConnector1">
             <a:avLst/>
@@ -10238,8 +10238,8 @@
         </p:nvCxnSpPr>
         <p:spPr>
           <a:xfrm flipH="1">
-            <a:off x="4798919" y="3977071"/>
-            <a:ext cx="581203" cy="0"/>
+            <a:off x="4825028" y="3977071"/>
+            <a:ext cx="555094" cy="0"/>
           </a:xfrm>
           <a:prstGeom prst="straightConnector1">
             <a:avLst/>
@@ -10845,8 +10845,8 @@
         </p:nvSpPr>
         <p:spPr>
           <a:xfrm>
-            <a:off x="4276728" y="3642661"/>
-            <a:ext cx="522191" cy="668819"/>
+            <a:off x="4250618" y="3642661"/>
+            <a:ext cx="574410" cy="668819"/>
           </a:xfrm>
           <a:prstGeom prst="rect">
             <a:avLst/>
@@ -10880,7 +10880,7 @@
                 <a:latin typeface="微软雅黑" panose="020B0503020204020204" pitchFamily="34" charset="-122"/>
                 <a:ea typeface="微软雅黑" panose="020B0503020204020204" pitchFamily="34" charset="-122"/>
               </a:rPr>
-              <a:t>水平运输调度</a:t>
+              <a:t>内集卡调度</a:t>
             </a:r>
           </a:p>
         </p:txBody>
@@ -11739,9 +11739,9 @@
           <p:nvPr/>
         </p:nvCxnSpPr>
         <p:spPr>
-          <a:xfrm flipH="1">
+          <a:xfrm>
             <a:off x="4537823" y="4311480"/>
-            <a:ext cx="1" cy="476366"/>
+            <a:ext cx="0" cy="476366"/>
           </a:xfrm>
           <a:prstGeom prst="straightConnector1">
             <a:avLst/>
@@ -11783,7 +11783,7 @@
         <p:spPr>
           <a:xfrm>
             <a:off x="4489004" y="4418774"/>
-            <a:ext cx="800219" cy="184666"/>
+            <a:ext cx="723275" cy="184666"/>
           </a:xfrm>
           <a:prstGeom prst="rect">
             <a:avLst/>
@@ -11798,7 +11798,7 @@
           <a:p>
             <a:r>
               <a:rPr lang="zh-CN" altLang="en-US" sz="600" dirty="0"/>
-              <a:t>水平运输作业指令</a:t>
+              <a:t>内集卡作业指令</a:t>
             </a:r>
           </a:p>
         </p:txBody>
@@ -12355,7 +12355,7 @@
         <p:spPr>
           <a:xfrm>
             <a:off x="3695525" y="3977071"/>
-            <a:ext cx="581203" cy="0"/>
+            <a:ext cx="555093" cy="0"/>
           </a:xfrm>
           <a:prstGeom prst="straightConnector1">
             <a:avLst/>
@@ -12400,8 +12400,8 @@
         </p:nvCxnSpPr>
         <p:spPr>
           <a:xfrm flipH="1">
-            <a:off x="4798919" y="3977071"/>
-            <a:ext cx="581203" cy="0"/>
+            <a:off x="4825028" y="3977071"/>
+            <a:ext cx="555094" cy="0"/>
           </a:xfrm>
           <a:prstGeom prst="straightConnector1">
             <a:avLst/>
